--- a/landing/assets/FE.pptx
+++ b/landing/assets/FE.pptx
@@ -6057,7 +6057,7 @@
                 <a:ea typeface="Malgun Gothic" pitchFamily="34" charset="-122"/>
                 <a:cs typeface="Malgun Gothic" pitchFamily="34" charset="-120"/>
               </a:rPr>
-              <a:t>Tailwind CSS 4</a:t>
+              <a:t>CSS Modules</a:t>
             </a:r>
             <a:endParaRPr lang="en-US" sz="1250" dirty="0"/>
           </a:p>
